--- a/サンリーノ港北センター北_フロア別販売図面.pptx
+++ b/サンリーノ港北センター北_フロア別販売図面.pptx
@@ -1334,7 +1334,7 @@
                 <a:ea typeface="Meiryo" pitchFamily="34" charset="-122"/>
                 <a:cs typeface="Meiryo" pitchFamily="34" charset="-120"/>
               </a:rPr>
-              <a:t>2億7,048</a:t>
+              <a:t>2億7,996</a:t>
             </a:r>
             <a:pPr indent="0" marL="0">
               <a:buNone/>
@@ -1465,7 +1465,7 @@
                 <a:ea typeface="Meiryo" pitchFamily="34" charset="-122"/>
                 <a:cs typeface="Meiryo" pitchFamily="34" charset="-120"/>
               </a:rPr>
-              <a:t>4.83</a:t>
+              <a:t>4.66</a:t>
             </a:r>
             <a:pPr indent="0" marL="0">
               <a:buNone/>
@@ -1518,7 +1518,7 @@
                 <a:ea typeface="Meiryo" pitchFamily="34" charset="-122"/>
                 <a:cs typeface="Meiryo" pitchFamily="34" charset="-120"/>
               </a:rPr>
-              <a:t>表面 5.14％</a:t>
+              <a:t>表面 4.97％</a:t>
             </a:r>
             <a:endParaRPr lang="en-US" sz="1200" dirty="0"/>
           </a:p>
@@ -1596,7 +1596,7 @@
                 <a:ea typeface="Meiryo" pitchFamily="34" charset="-122"/>
                 <a:cs typeface="Meiryo" pitchFamily="34" charset="-120"/>
               </a:rPr>
-              <a:t>3.72</a:t>
+              <a:t>3.41</a:t>
             </a:r>
             <a:pPr indent="0" marL="0">
               <a:buNone/>
@@ -1649,7 +1649,7 @@
                 <a:ea typeface="Meiryo" pitchFamily="34" charset="-122"/>
                 <a:cs typeface="Meiryo" pitchFamily="34" charset="-120"/>
               </a:rPr>
-              <a:t>表面 3.96％</a:t>
+              <a:t>表面 3.83％</a:t>
             </a:r>
             <a:endParaRPr lang="en-US" sz="1200" dirty="0"/>
           </a:p>
@@ -1853,7 +1853,7 @@
                 <a:ea typeface="Meiryo" pitchFamily="34" charset="-122"/>
                 <a:cs typeface="Meiryo" pitchFamily="34" charset="-120"/>
               </a:rPr>
-              <a:t>287.0万円</a:t>
+              <a:t>297.0万円</a:t>
             </a:r>
             <a:endParaRPr lang="en-US" sz="1300" dirty="0"/>
           </a:p>
@@ -1892,7 +1892,7 @@
                 <a:ea typeface="Meiryo" pitchFamily="34" charset="-122"/>
                 <a:cs typeface="Meiryo" pitchFamily="34" charset="-120"/>
               </a:rPr>
-              <a:t>区画数</a:t>
+              <a:t>購入一時金</a:t>
             </a:r>
             <a:endParaRPr lang="en-US" sz="1200" dirty="0"/>
           </a:p>
@@ -1931,7 +1931,7 @@
                 <a:ea typeface="Meiryo" pitchFamily="34" charset="-122"/>
                 <a:cs typeface="Meiryo" pitchFamily="34" charset="-120"/>
               </a:rPr>
-              <a:t>4区画・全室賃貸中</a:t>
+              <a:t>3,484,800円</a:t>
             </a:r>
             <a:endParaRPr lang="en-US" sz="1300" dirty="0"/>
           </a:p>
@@ -3739,7 +3739,7 @@
         <p:spPr>
           <a:xfrm>
             <a:off x="4896612" y="5545836"/>
-            <a:ext cx="36576" cy="411480"/>
+            <a:ext cx="36576" cy="384048"/>
           </a:xfrm>
           <a:prstGeom prst="rect">
             <a:avLst/>
@@ -3764,7 +3764,7 @@
         <p:spPr>
           <a:xfrm>
             <a:off x="5015484" y="5545836"/>
-            <a:ext cx="5425135" cy="411480"/>
+            <a:ext cx="5425135" cy="384048"/>
           </a:xfrm>
           <a:prstGeom prst="rect">
             <a:avLst/>
@@ -3822,8 +3822,8 @@
         </p:nvSpPr>
         <p:spPr>
           <a:xfrm>
-            <a:off x="4896612" y="6030468"/>
-            <a:ext cx="5544007" cy="411480"/>
+            <a:off x="4896612" y="5957316"/>
+            <a:ext cx="5544007" cy="530352"/>
           </a:xfrm>
           <a:prstGeom prst="rect">
             <a:avLst/>
@@ -3837,12 +3837,12 @@
           <a:p>
             <a:pPr indent="0" marL="0">
               <a:lnSpc>
-                <a:spcPts val="800"/>
+                <a:spcPts val="700"/>
               </a:lnSpc>
               <a:buNone/>
             </a:pPr>
             <a:r>
-              <a:rPr lang="en-US" sz="550" dirty="0">
+              <a:rPr lang="en-US" sz="500" dirty="0">
                 <a:solidFill>
                   <a:srgbClr val="7C8783"/>
                 </a:solidFill>
@@ -3850,9 +3850,9 @@
                 <a:ea typeface="Meiryo" pitchFamily="34" charset="-122"/>
                 <a:cs typeface="Meiryo" pitchFamily="34" charset="-120"/>
               </a:rPr>
-              <a:t>※査定賃料は当社の査定によるもので、実際の賃料改定は賃借人との個別協議によります。想定利回り（NOI）は満室想定の年間賃料（税別）から一定の経費を控除して算出しており、公租公課・管理費・修繕積立金等の実額により変動します。将来の収益を保証するものではありません。表面利回りは経費控除前の数値です。別途、管理費・修繕積立金・公租公課および取得時諸費用が必要です。価格・条件は予告なく変更される場合があり、最終条件は売買契約書によります。本物件は共同住宅を含む一棟の建物の一部（区分所有）です。管理規約上の用途制限、一部共用部分の負担区分等は別途資料にてご確認ください。</a:t>
-            </a:r>
-            <a:endParaRPr lang="en-US" sz="550" dirty="0"/>
+              <a:t>※査定賃料は2026年4月6日付ハウジングセンター（株）家賃査定報告に基づく当社査定であり、実際の賃料改定は賃借人との個別協議によります。NOIは（年間賃料（税込）−管理費等−固定資産税等）÷（販売価格（税込）＋購入一時金）で算出。固定資産税等は想定額であり正式な額ではありません。管理費・修繕積立金・駐車場・看板料等は最終確定前のため変更となる場合があります。表面利回りは経費控除前（年間賃料（税別）÷販売価格（税込））。別途、管理費等 月123,080円・固定資産税等（想定）年650,200円および取得時諸費用が必要です。価格・条件は予告なく変更される場合があり、最終条件は売買契約書によります。本物件は共同住宅を含む一棟の建物の一部（区分所有）です。管理規約上の用途制限、一部共用部分の負担区分等は別途資料にてご確認ください。</a:t>
+            </a:r>
+            <a:endParaRPr lang="en-US" sz="500" dirty="0"/>
           </a:p>
         </p:txBody>
       </p:sp>
@@ -4685,7 +4685,7 @@
                 <a:ea typeface="Meiryo" pitchFamily="34" charset="-122"/>
                 <a:cs typeface="Meiryo" pitchFamily="34" charset="-120"/>
               </a:rPr>
-              <a:t>3億3,941</a:t>
+              <a:t>3億4,796</a:t>
             </a:r>
             <a:pPr indent="0" marL="0">
               <a:buNone/>
@@ -4816,7 +4816,7 @@
                 <a:ea typeface="Meiryo" pitchFamily="34" charset="-122"/>
                 <a:cs typeface="Meiryo" pitchFamily="34" charset="-120"/>
               </a:rPr>
-              <a:t>5.15</a:t>
+              <a:t>4.96</a:t>
             </a:r>
             <a:pPr indent="0" marL="0">
               <a:buNone/>
@@ -4869,7 +4869,7 @@
                 <a:ea typeface="Meiryo" pitchFamily="34" charset="-122"/>
                 <a:cs typeface="Meiryo" pitchFamily="34" charset="-120"/>
               </a:rPr>
-              <a:t>表面 5.48％</a:t>
+              <a:t>表面 5.34％</a:t>
             </a:r>
             <a:endParaRPr lang="en-US" sz="1200" dirty="0"/>
           </a:p>
@@ -4947,7 +4947,7 @@
                 <a:ea typeface="Meiryo" pitchFamily="34" charset="-122"/>
                 <a:cs typeface="Meiryo" pitchFamily="34" charset="-120"/>
               </a:rPr>
-              <a:t>3.90</a:t>
+              <a:t>3.56</a:t>
             </a:r>
             <a:pPr indent="0" marL="0">
               <a:buNone/>
@@ -5000,7 +5000,7 @@
                 <a:ea typeface="Meiryo" pitchFamily="34" charset="-122"/>
                 <a:cs typeface="Meiryo" pitchFamily="34" charset="-120"/>
               </a:rPr>
-              <a:t>表面 4.15％</a:t>
+              <a:t>表面 4.04％</a:t>
             </a:r>
             <a:endParaRPr lang="en-US" sz="1200" dirty="0"/>
           </a:p>
@@ -5204,7 +5204,7 @@
                 <a:ea typeface="Meiryo" pitchFamily="34" charset="-122"/>
                 <a:cs typeface="Meiryo" pitchFamily="34" charset="-120"/>
               </a:rPr>
-              <a:t>259.7万円</a:t>
+              <a:t>266.2万円</a:t>
             </a:r>
             <a:endParaRPr lang="en-US" sz="1300" dirty="0"/>
           </a:p>
@@ -5243,7 +5243,7 @@
                 <a:ea typeface="Meiryo" pitchFamily="34" charset="-122"/>
                 <a:cs typeface="Meiryo" pitchFamily="34" charset="-120"/>
               </a:rPr>
-              <a:t>区画数</a:t>
+              <a:t>購入一時金</a:t>
             </a:r>
             <a:endParaRPr lang="en-US" sz="1200" dirty="0"/>
           </a:p>
@@ -5282,7 +5282,7 @@
                 <a:ea typeface="Meiryo" pitchFamily="34" charset="-122"/>
                 <a:cs typeface="Meiryo" pitchFamily="34" charset="-120"/>
               </a:rPr>
-              <a:t>4区画・全室賃貸中</a:t>
+              <a:t>5,613,000円</a:t>
             </a:r>
             <a:endParaRPr lang="en-US" sz="1300" dirty="0"/>
           </a:p>
@@ -7090,7 +7090,7 @@
         <p:spPr>
           <a:xfrm>
             <a:off x="4896612" y="5545836"/>
-            <a:ext cx="36576" cy="411480"/>
+            <a:ext cx="36576" cy="384048"/>
           </a:xfrm>
           <a:prstGeom prst="rect">
             <a:avLst/>
@@ -7115,7 +7115,7 @@
         <p:spPr>
           <a:xfrm>
             <a:off x="5015484" y="5545836"/>
-            <a:ext cx="5425135" cy="411480"/>
+            <a:ext cx="5425135" cy="384048"/>
           </a:xfrm>
           <a:prstGeom prst="rect">
             <a:avLst/>
@@ -7173,8 +7173,8 @@
         </p:nvSpPr>
         <p:spPr>
           <a:xfrm>
-            <a:off x="4896612" y="6030468"/>
-            <a:ext cx="5544007" cy="411480"/>
+            <a:off x="4896612" y="5957316"/>
+            <a:ext cx="5544007" cy="530352"/>
           </a:xfrm>
           <a:prstGeom prst="rect">
             <a:avLst/>
@@ -7188,12 +7188,12 @@
           <a:p>
             <a:pPr indent="0" marL="0">
               <a:lnSpc>
-                <a:spcPts val="800"/>
+                <a:spcPts val="700"/>
               </a:lnSpc>
               <a:buNone/>
             </a:pPr>
             <a:r>
-              <a:rPr lang="en-US" sz="550" dirty="0">
+              <a:rPr lang="en-US" sz="500" dirty="0">
                 <a:solidFill>
                   <a:srgbClr val="7C8783"/>
                 </a:solidFill>
@@ -7201,9 +7201,9 @@
                 <a:ea typeface="Meiryo" pitchFamily="34" charset="-122"/>
                 <a:cs typeface="Meiryo" pitchFamily="34" charset="-120"/>
               </a:rPr>
-              <a:t>※査定賃料は当社の査定によるもので、実際の賃料改定は賃借人との個別協議によります。想定利回り（NOI）は満室想定の年間賃料（税別）から一定の経費を控除して算出しており、公租公課・管理費・修繕積立金等の実額により変動します。将来の収益を保証するものではありません。表面利回りは経費控除前の数値です。別途、管理費・修繕積立金・公租公課および取得時諸費用が必要です。価格・条件は予告なく変更される場合があり、最終条件は売買契約書によります。本物件は共同住宅を含む一棟の建物の一部（区分所有）です。管理規約上の用途制限、一部共用部分の負担区分等は別途資料にてご確認ください。</a:t>
-            </a:r>
-            <a:endParaRPr lang="en-US" sz="550" dirty="0"/>
+              <a:t>※査定賃料は2026年4月6日付ハウジングセンター（株）家賃査定報告に基づく当社査定であり、実際の賃料改定は賃借人との個別協議によります。NOIは（年間賃料（税込）−管理費等−固定資産税等）÷（販売価格（税込）＋購入一時金）で算出。固定資産税等は想定額であり正式な額ではありません。管理費・修繕積立金・駐車場・看板料等は最終確定前のため変更となる場合があります。表面利回りは経費控除前（年間賃料（税別）÷販売価格（税込））。別途、管理費等 月170,680円・固定資産税等（想定）年834,400円および取得時諸費用が必要です。価格・条件は予告なく変更される場合があり、最終条件は売買契約書によります。本物件は共同住宅を含む一棟の建物の一部（区分所有）です。管理規約上の用途制限、一部共用部分の負担区分等は別途資料にてご確認ください。</a:t>
+            </a:r>
+            <a:endParaRPr lang="en-US" sz="500" dirty="0"/>
           </a:p>
         </p:txBody>
       </p:sp>
